--- a/classes/parte-8-blue-team-deteccion-y-soc/183-siem-arquitectura-y-componentes/clase-183-presentacion.pptx
+++ b/classes/parte-8-blue-team-deteccion-y-soc/183-siem-arquitectura-y-componentes/clase-183-presentacion.pptx
@@ -17,6 +17,11 @@
     <p:sldId id="265" r:id="rId16"/>
     <p:sldId id="266" r:id="rId17"/>
     <p:sldId id="267" r:id="rId18"/>
+    <p:sldId id="268" r:id="rId19"/>
+    <p:sldId id="269" r:id="rId20"/>
+    <p:sldId id="270" r:id="rId21"/>
+    <p:sldId id="271" r:id="rId22"/>
+    <p:sldId id="272" r:id="rId23"/>
   </p:sldIdLst>
   <p:sldSz cx="9144000" cy="6858000" type="screen4x3"/>
   <p:notesSz cx="6858000" cy="9144000"/>
@@ -3198,7 +3203,7 @@
                   <a:srgbClr val="0B3D2E"/>
                 </a:solidFill>
               </a:rPr>
-              <a:t>⚠️ Errores comunes</a:t>
+              <a:t>🧰 Herramientas y preparación</a:t>
             </a:r>
           </a:p>
         </p:txBody>
@@ -3236,67 +3241,67 @@
                   <a:srgbClr val="22282E"/>
                 </a:solidFill>
               </a:rPr>
-              <a:t>•  Eventos llegan como texto plano — Falta parser para esa fuente; crea/asigna el sourcetype</a:t>
-            </a:r>
-          </a:p>
-          <a:p>
-            <a:pPr>
-              <a:spcAft>
-                <a:spcPts val="600"/>
-              </a:spcAft>
-            </a:pPr>
-            <a:r>
-              <a:rPr sz="1500">
-                <a:solidFill>
-                  <a:srgbClr val="22282E"/>
-                </a:solidFill>
-              </a:rPr>
-              <a:t>•  Licencia excedida en Splunk — Ingesta mayor a lo contratado; filtra ruido en el forwarder</a:t>
-            </a:r>
-          </a:p>
-          <a:p>
-            <a:pPr>
-              <a:spcAft>
-                <a:spcPts val="600"/>
-              </a:spcAft>
-            </a:pPr>
-            <a:r>
-              <a:rPr sz="1500">
-                <a:solidFill>
-                  <a:srgbClr val="22282E"/>
-                </a:solidFill>
-              </a:rPr>
-              <a:t>•  Búsquedas lentísimas — Retención mal segmentada; usa índices y fases hot/cold</a:t>
-            </a:r>
-          </a:p>
-          <a:p>
-            <a:pPr>
-              <a:spcAft>
-                <a:spcPts val="600"/>
-              </a:spcAft>
-            </a:pPr>
-            <a:r>
-              <a:rPr sz="1500">
-                <a:solidFill>
-                  <a:srgbClr val="22282E"/>
-                </a:solidFill>
-              </a:rPr>
-              <a:t>•  Alertas duplicadas — Correlación sin dedup ni throttling; añade ventana de supresión</a:t>
-            </a:r>
-          </a:p>
-          <a:p>
-            <a:pPr>
-              <a:spcAft>
-                <a:spcPts val="600"/>
-              </a:spcAft>
-            </a:pPr>
-            <a:r>
-              <a:rPr sz="1500">
-                <a:solidFill>
-                  <a:srgbClr val="22282E"/>
-                </a:solidFill>
-              </a:rPr>
-              <a:t>•  GeoIP vacío — Base de datos GeoIP no instalada/actualizada; refresca el feed</a:t>
+              <a:t>•  Para experimentar la arquitectura, prepara en laboratorio aislado uno de estos stacks:</a:t>
+            </a:r>
+          </a:p>
+          <a:p>
+            <a:pPr>
+              <a:spcAft>
+                <a:spcPts val="600"/>
+              </a:spcAft>
+            </a:pPr>
+            <a:r>
+              <a:rPr sz="1500">
+                <a:solidFill>
+                  <a:srgbClr val="22282E"/>
+                </a:solidFill>
+              </a:rPr>
+              <a:t>•  Splunk Free/Enterprise Trial con un Universal Forwarder enviando datos.</a:t>
+            </a:r>
+          </a:p>
+          <a:p>
+            <a:pPr>
+              <a:spcAft>
+                <a:spcPts val="600"/>
+              </a:spcAft>
+            </a:pPr>
+            <a:r>
+              <a:rPr sz="1500">
+                <a:solidFill>
+                  <a:srgbClr val="22282E"/>
+                </a:solidFill>
+              </a:rPr>
+              <a:t>•  Elastic Stack (Elasticsearch + Logstash/Beats + Kibana) vía Docker Compose.</a:t>
+            </a:r>
+          </a:p>
+          <a:p>
+            <a:pPr>
+              <a:spcAft>
+                <a:spcPts val="600"/>
+              </a:spcAft>
+            </a:pPr>
+            <a:r>
+              <a:rPr sz="1500">
+                <a:solidFill>
+                  <a:srgbClr val="22282E"/>
+                </a:solidFill>
+              </a:rPr>
+              <a:t>•  Wazuh (indexer + manager + dashboard) para un SIEM open source completo.</a:t>
+            </a:r>
+          </a:p>
+          <a:p>
+            <a:pPr>
+              <a:spcAft>
+                <a:spcPts val="600"/>
+              </a:spcAft>
+            </a:pPr>
+            <a:r>
+              <a:rPr sz="1500">
+                <a:solidFill>
+                  <a:srgbClr val="22282E"/>
+                </a:solidFill>
+              </a:rPr>
+              <a:t>•  Reutiliza la telemetría de la clase 182 (Sysmon, Zeek) como fuente de ingesta. Trabaja siempre en tu red de laboratorio.</a:t>
             </a:r>
           </a:p>
         </p:txBody>
@@ -3347,7 +3352,7 @@
                   <a:srgbClr val="0B3D2E"/>
                 </a:solidFill>
               </a:rPr>
-              <a:t>❓ Preguntas frecuentes</a:t>
+              <a:t>🧪 Laboratorio guiado — Traza un evento de punta a punta</a:t>
             </a:r>
           </a:p>
         </p:txBody>
@@ -3385,82 +3390,97 @@
                   <a:srgbClr val="22282E"/>
                 </a:solidFill>
               </a:rPr>
-              <a:t>•  ❓ ¿SIEM o data lake?</a:t>
-            </a:r>
-          </a:p>
-          <a:p>
-            <a:pPr>
-              <a:spcAft>
-                <a:spcPts val="600"/>
-              </a:spcAft>
-            </a:pPr>
-            <a:r>
-              <a:rPr sz="1500">
-                <a:solidFill>
-                  <a:srgbClr val="22282E"/>
-                </a:solidFill>
-              </a:rPr>
-              <a:t>•  El SIEM prioriza correlación y alertas en tiempo real; el data lake, almacenamiento masivo barato. Muchas arquitecturas modernas combinan ambos (SIEM para lo caliente, lake para histórico).</a:t>
-            </a:r>
-          </a:p>
-          <a:p>
-            <a:pPr>
-              <a:spcAft>
-                <a:spcPts val="600"/>
-              </a:spcAft>
-            </a:pPr>
-            <a:r>
-              <a:rPr sz="1500">
-                <a:solidFill>
-                  <a:srgbClr val="22282E"/>
-                </a:solidFill>
-              </a:rPr>
-              <a:t>•  ❓ ¿El SIEM reemplaza al EDR?</a:t>
-            </a:r>
-          </a:p>
-          <a:p>
-            <a:pPr>
-              <a:spcAft>
-                <a:spcPts val="600"/>
-              </a:spcAft>
-            </a:pPr>
-            <a:r>
-              <a:rPr sz="1500">
-                <a:solidFill>
-                  <a:srgbClr val="22282E"/>
-                </a:solidFill>
-              </a:rPr>
-              <a:t>•  No. El EDR ve el endpoint en profundidad y responde; el SIEM correlaciona todas las fuentes. Se complementan; el EDR suele ser una fuente del SIEM.</a:t>
-            </a:r>
-          </a:p>
-          <a:p>
-            <a:pPr>
-              <a:spcAft>
-                <a:spcPts val="600"/>
-              </a:spcAft>
-            </a:pPr>
-            <a:r>
-              <a:rPr sz="1500">
-                <a:solidFill>
-                  <a:srgbClr val="22282E"/>
-                </a:solidFill>
-              </a:rPr>
-              <a:t>•  ❓ ¿Cómo evito que el SIEM se vuelva un basurero de logs?</a:t>
-            </a:r>
-          </a:p>
-          <a:p>
-            <a:pPr>
-              <a:spcAft>
-                <a:spcPts val="600"/>
-              </a:spcAft>
-            </a:pPr>
-            <a:r>
-              <a:rPr sz="1500">
-                <a:solidFill>
-                  <a:srgbClr val="22282E"/>
-                </a:solidFill>
-              </a:rPr>
-              <a:t>•  Ingesta con propósito de detección, no por acumular. Cada fuente debe respaldar al menos un caso de uso de detección o hunting.</a:t>
+              <a:t>•  Levanta el SIEM. Con Docker Compose despliega Elastic (o instala Splunk Free). Confirma acceso a Kibana/Splunk Web.</a:t>
+            </a:r>
+          </a:p>
+          <a:p>
+            <a:pPr>
+              <a:spcAft>
+                <a:spcPts val="600"/>
+              </a:spcAft>
+            </a:pPr>
+            <a:r>
+              <a:rPr sz="1500">
+                <a:solidFill>
+                  <a:srgbClr val="22282E"/>
+                </a:solidFill>
+              </a:rPr>
+              <a:t>•  Conecta una fuente. Reenvía los Sysmon/Event Logs del Windows de laboratorio con Winlogbeat/Universal Forwarder.</a:t>
+            </a:r>
+          </a:p>
+          <a:p>
+            <a:pPr>
+              <a:spcAft>
+                <a:spcPts val="600"/>
+              </a:spcAft>
+            </a:pPr>
+            <a:r>
+              <a:rPr sz="1500">
+                <a:solidFill>
+                  <a:srgbClr val="22282E"/>
+                </a:solidFill>
+              </a:rPr>
+              <a:t>•  Verifica el parsing. Busca un evento de creación de proceso y comprueba que campos como process.commandline o Image están extraídos, no en texto plano.</a:t>
+            </a:r>
+          </a:p>
+          <a:p>
+            <a:pPr>
+              <a:spcAft>
+                <a:spcPts val="600"/>
+              </a:spcAft>
+            </a:pPr>
+            <a:r>
+              <a:rPr sz="1500">
+                <a:solidFill>
+                  <a:srgbClr val="22282E"/>
+                </a:solidFill>
+              </a:rPr>
+              <a:t>•  Añade enriquecimiento. Configura un pipeline que agregue GeoIP a las IP públicas (Logstash geoip o Splunk iplocation).</a:t>
+            </a:r>
+          </a:p>
+          <a:p>
+            <a:pPr>
+              <a:spcAft>
+                <a:spcPts val="600"/>
+              </a:spcAft>
+            </a:pPr>
+            <a:r>
+              <a:rPr sz="1500">
+                <a:solidFill>
+                  <a:srgbClr val="22282E"/>
+                </a:solidFill>
+              </a:rPr>
+              <a:t>•  Escribe una correlación simple. Regla que alerte ante 5 fallos de autenticación (Event ID 4625) seguidos de un éxito (4624) para el mismo usuario en 5 minutos.</a:t>
+            </a:r>
+          </a:p>
+          <a:p>
+            <a:pPr>
+              <a:spcAft>
+                <a:spcPts val="600"/>
+              </a:spcAft>
+            </a:pPr>
+            <a:r>
+              <a:rPr sz="1500">
+                <a:solidFill>
+                  <a:srgbClr val="22282E"/>
+                </a:solidFill>
+              </a:rPr>
+              <a:t>•  Mide la ingesta. Observa EPS/GB por día en el panel de monitoreo del SIEM y proyecta el volumen a 30 días.</a:t>
+            </a:r>
+          </a:p>
+          <a:p>
+            <a:pPr>
+              <a:spcAft>
+                <a:spcPts val="600"/>
+              </a:spcAft>
+            </a:pPr>
+            <a:r>
+              <a:rPr sz="1500">
+                <a:solidFill>
+                  <a:srgbClr val="22282E"/>
+                </a:solidFill>
+              </a:rPr>
+              <a:t>•  Prueba retención. Configura un índice con política de ciclo de vida (ILM en Elastic) que mueva datos a fase fría a los 7 días.</a:t>
             </a:r>
           </a:p>
         </p:txBody>
@@ -3511,7 +3531,7 @@
                   <a:srgbClr val="0B3D2E"/>
                 </a:solidFill>
               </a:rPr>
-              <a:t>🔗 Referencias</a:t>
+              <a:t>✍️ Ejercicios</a:t>
             </a:r>
           </a:p>
         </p:txBody>
@@ -3549,71 +3569,712 @@
                   <a:srgbClr val="22282E"/>
                 </a:solidFill>
               </a:rPr>
-              <a:t>•  Murdoch, D. Blue Team Handbook: SOC, SIEM, and Threat Hunting Use Cases.</a:t>
-            </a:r>
-          </a:p>
-          <a:p>
-            <a:pPr>
-              <a:spcAft>
-                <a:spcPts val="600"/>
-              </a:spcAft>
-            </a:pPr>
-            <a:r>
-              <a:rPr sz="1500">
-                <a:solidFill>
-                  <a:srgbClr val="22282E"/>
-                </a:solidFill>
-              </a:rPr>
-              <a:t>•  Gartner, "Magic Quadrant for SIEM" (marco conceptual de capacidades).</a:t>
-            </a:r>
-          </a:p>
-          <a:p>
-            <a:pPr>
-              <a:spcAft>
-                <a:spcPts val="600"/>
-              </a:spcAft>
-            </a:pPr>
-            <a:r>
-              <a:rPr sz="1500">
-                <a:solidFill>
-                  <a:srgbClr val="22282E"/>
-                </a:solidFill>
-              </a:rPr>
-              <a:t>•  Elastic SIEM/Security docs — &lt;https://www.elastic.co/security&gt;</a:t>
-            </a:r>
-          </a:p>
-          <a:p>
-            <a:pPr>
-              <a:spcAft>
-                <a:spcPts val="600"/>
-              </a:spcAft>
-            </a:pPr>
-            <a:r>
-              <a:rPr sz="1500">
-                <a:solidFill>
-                  <a:srgbClr val="22282E"/>
-                </a:solidFill>
-              </a:rPr>
-              <a:t>•  Splunk Docs, "How indexing works" — &lt;https://docs.splunk.com/&gt;</a:t>
-            </a:r>
-          </a:p>
-          <a:p>
-            <a:pPr>
-              <a:spcAft>
-                <a:spcPts val="600"/>
-              </a:spcAft>
-            </a:pPr>
-            <a:r>
-              <a:rPr sz="1500">
-                <a:solidFill>
-                  <a:srgbClr val="22282E"/>
-                </a:solidFill>
-              </a:rPr>
-              <a:t>•  Wazuh Documentation — &lt;https://documentation.wazuh.com/&gt;</a:t>
-            </a:r>
-          </a:p>
-        </p:txBody>
-      </p:sp>
+              <a:t>•  Dibuja el pipeline completo de tu SIEM con cada componente etiquetado.</a:t>
+            </a:r>
+          </a:p>
+          <a:p>
+            <a:pPr>
+              <a:spcAft>
+                <a:spcPts val="600"/>
+              </a:spcAft>
+            </a:pPr>
+            <a:r>
+              <a:rPr sz="1500">
+                <a:solidFill>
+                  <a:srgbClr val="22282E"/>
+                </a:solidFill>
+              </a:rPr>
+              <a:t>•  Calcula el GB/día si ingestas 2.000 EPS con un tamaño medio de evento de 800 bytes.</a:t>
+            </a:r>
+          </a:p>
+          <a:p>
+            <a:pPr>
+              <a:spcAft>
+                <a:spcPts val="600"/>
+              </a:spcAft>
+            </a:pPr>
+            <a:r>
+              <a:rPr sz="1500">
+                <a:solidFill>
+                  <a:srgbClr val="22282E"/>
+                </a:solidFill>
+              </a:rPr>
+              <a:t>•  Escribe el parser (regex o pipeline) para una línea de log de tu firewall.</a:t>
+            </a:r>
+          </a:p>
+          <a:p>
+            <a:pPr>
+              <a:spcAft>
+                <a:spcPts val="600"/>
+              </a:spcAft>
+            </a:pPr>
+            <a:r>
+              <a:rPr sz="1500">
+                <a:solidFill>
+                  <a:srgbClr val="22282E"/>
+                </a:solidFill>
+              </a:rPr>
+              <a:t>•  Compara SIEM on-prem vs cloud-native con 4 criterios (coste, escalado, control, mantenimiento).</a:t>
+            </a:r>
+          </a:p>
+          <a:p>
+            <a:pPr>
+              <a:spcAft>
+                <a:spcPts val="600"/>
+              </a:spcAft>
+            </a:pPr>
+            <a:r>
+              <a:rPr sz="1500">
+                <a:solidFill>
+                  <a:srgbClr val="22282E"/>
+                </a:solidFill>
+              </a:rPr>
+              <a:t>•  Diseña un esquema de enriquecimiento con 3 fuentes de contexto.</a:t>
+            </a:r>
+          </a:p>
+          <a:p>
+            <a:pPr>
+              <a:spcAft>
+                <a:spcPts val="600"/>
+              </a:spcAft>
+            </a:pPr>
+            <a:r>
+              <a:rPr sz="1500">
+                <a:solidFill>
+                  <a:srgbClr val="22282E"/>
+                </a:solidFill>
+              </a:rPr>
+              <a:t>•  Justifica una política hot/warm/cold para 90 días de retención.</a:t>
+            </a:r>
+          </a:p>
+        </p:txBody>
+      </p:sp>
+    </p:spTree>
+  </p:cSld>
+  <p:clrMapOvr>
+    <a:masterClrMapping/>
+  </p:clrMapOvr>
+</p:sld>
+</file>
+
+<file path=ppt/slides/slide13.xml><?xml version="1.0" encoding="utf-8"?>
+<p:sld xmlns:a="http://schemas.openxmlformats.org/drawingml/2006/main" xmlns:p="http://schemas.openxmlformats.org/presentationml/2006/main" xmlns:r="http://schemas.openxmlformats.org/officeDocument/2006/relationships">
+  <p:cSld>
+    <p:spTree>
+      <p:nvGrpSpPr>
+        <p:cNvPr id="1" name=""/>
+        <p:cNvGrpSpPr/>
+        <p:nvPr/>
+      </p:nvGrpSpPr>
+      <p:grpSpPr/>
+      <p:sp>
+        <p:nvSpPr>
+          <p:cNvPr id="2" name="TextBox 1"/>
+          <p:cNvSpPr txBox="1"/>
+          <p:nvPr/>
+        </p:nvSpPr>
+        <p:spPr>
+          <a:xfrm>
+            <a:off x="457200" y="320040"/>
+            <a:ext cx="8229600" cy="822960"/>
+          </a:xfrm>
+          <a:prstGeom prst="rect">
+            <a:avLst/>
+          </a:prstGeom>
+          <a:noFill/>
+        </p:spPr>
+        <p:txBody>
+          <a:bodyPr wrap="square">
+            <a:spAutoFit/>
+          </a:bodyPr>
+          <a:lstStyle/>
+          <a:p>
+            <a:r>
+              <a:rPr sz="2600" b="1">
+                <a:solidFill>
+                  <a:srgbClr val="0B3D2E"/>
+                </a:solidFill>
+              </a:rPr>
+              <a:t>📝 Reto verificable</a:t>
+            </a:r>
+          </a:p>
+        </p:txBody>
+      </p:sp>
+      <p:sp>
+        <p:nvSpPr>
+          <p:cNvPr id="3" name="TextBox 2"/>
+          <p:cNvSpPr txBox="1"/>
+          <p:nvPr/>
+        </p:nvSpPr>
+        <p:spPr>
+          <a:xfrm>
+            <a:off x="457200" y="1280160"/>
+            <a:ext cx="8229600" cy="4937760"/>
+          </a:xfrm>
+          <a:prstGeom prst="rect">
+            <a:avLst/>
+          </a:prstGeom>
+          <a:noFill/>
+        </p:spPr>
+        <p:txBody>
+          <a:bodyPr wrap="square">
+            <a:spAutoFit/>
+          </a:bodyPr>
+          <a:lstStyle/>
+          <a:p>
+            <a:pPr>
+              <a:spcAft>
+                <a:spcPts val="600"/>
+              </a:spcAft>
+            </a:pPr>
+            <a:r>
+              <a:rPr sz="1500">
+                <a:solidFill>
+                  <a:srgbClr val="22282E"/>
+                </a:solidFill>
+              </a:rPr>
+              <a:t>•  Documenta el recorrido de un evento real de tu laboratorio: captura de pantalla del dato crudo, del dato parseado con sus campos, del enriquecimiento aplicado y de la alerta correlacionada que…</a:t>
+            </a:r>
+          </a:p>
+        </p:txBody>
+      </p:sp>
+    </p:spTree>
+  </p:cSld>
+  <p:clrMapOvr>
+    <a:masterClrMapping/>
+  </p:clrMapOvr>
+</p:sld>
+</file>
+
+<file path=ppt/slides/slide14.xml><?xml version="1.0" encoding="utf-8"?>
+<p:sld xmlns:a="http://schemas.openxmlformats.org/drawingml/2006/main" xmlns:p="http://schemas.openxmlformats.org/presentationml/2006/main" xmlns:r="http://schemas.openxmlformats.org/officeDocument/2006/relationships">
+  <p:cSld>
+    <p:spTree>
+      <p:nvGrpSpPr>
+        <p:cNvPr id="1" name=""/>
+        <p:cNvGrpSpPr/>
+        <p:nvPr/>
+      </p:nvGrpSpPr>
+      <p:grpSpPr/>
+      <p:sp>
+        <p:nvSpPr>
+          <p:cNvPr id="2" name="TextBox 1"/>
+          <p:cNvSpPr txBox="1"/>
+          <p:nvPr/>
+        </p:nvSpPr>
+        <p:spPr>
+          <a:xfrm>
+            <a:off x="457200" y="320040"/>
+            <a:ext cx="8229600" cy="822960"/>
+          </a:xfrm>
+          <a:prstGeom prst="rect">
+            <a:avLst/>
+          </a:prstGeom>
+          <a:noFill/>
+        </p:spPr>
+        <p:txBody>
+          <a:bodyPr wrap="square">
+            <a:spAutoFit/>
+          </a:bodyPr>
+          <a:lstStyle/>
+          <a:p>
+            <a:r>
+              <a:rPr sz="2600" b="1">
+                <a:solidFill>
+                  <a:srgbClr val="0B3D2E"/>
+                </a:solidFill>
+              </a:rPr>
+              <a:t>⚠️ Errores comunes</a:t>
+            </a:r>
+          </a:p>
+        </p:txBody>
+      </p:sp>
+      <p:sp>
+        <p:nvSpPr>
+          <p:cNvPr id="3" name="TextBox 2"/>
+          <p:cNvSpPr txBox="1"/>
+          <p:nvPr/>
+        </p:nvSpPr>
+        <p:spPr>
+          <a:xfrm>
+            <a:off x="457200" y="1280160"/>
+            <a:ext cx="8229600" cy="4937760"/>
+          </a:xfrm>
+          <a:prstGeom prst="rect">
+            <a:avLst/>
+          </a:prstGeom>
+          <a:noFill/>
+        </p:spPr>
+        <p:txBody>
+          <a:bodyPr wrap="square">
+            <a:spAutoFit/>
+          </a:bodyPr>
+          <a:lstStyle/>
+          <a:p>
+            <a:pPr>
+              <a:spcAft>
+                <a:spcPts val="600"/>
+              </a:spcAft>
+            </a:pPr>
+            <a:r>
+              <a:rPr sz="1500">
+                <a:solidFill>
+                  <a:srgbClr val="22282E"/>
+                </a:solidFill>
+              </a:rPr>
+              <a:t>•  Eventos llegan como texto plano — Falta parser para esa fuente; crea/asigna el sourcetype</a:t>
+            </a:r>
+          </a:p>
+          <a:p>
+            <a:pPr>
+              <a:spcAft>
+                <a:spcPts val="600"/>
+              </a:spcAft>
+            </a:pPr>
+            <a:r>
+              <a:rPr sz="1500">
+                <a:solidFill>
+                  <a:srgbClr val="22282E"/>
+                </a:solidFill>
+              </a:rPr>
+              <a:t>•  Licencia excedida en Splunk — Ingesta mayor a lo contratado; filtra ruido en el forwarder</a:t>
+            </a:r>
+          </a:p>
+          <a:p>
+            <a:pPr>
+              <a:spcAft>
+                <a:spcPts val="600"/>
+              </a:spcAft>
+            </a:pPr>
+            <a:r>
+              <a:rPr sz="1500">
+                <a:solidFill>
+                  <a:srgbClr val="22282E"/>
+                </a:solidFill>
+              </a:rPr>
+              <a:t>•  Búsquedas lentísimas — Retención mal segmentada; usa índices y fases hot/cold</a:t>
+            </a:r>
+          </a:p>
+          <a:p>
+            <a:pPr>
+              <a:spcAft>
+                <a:spcPts val="600"/>
+              </a:spcAft>
+            </a:pPr>
+            <a:r>
+              <a:rPr sz="1500">
+                <a:solidFill>
+                  <a:srgbClr val="22282E"/>
+                </a:solidFill>
+              </a:rPr>
+              <a:t>•  Alertas duplicadas — Correlación sin dedup ni throttling; añade ventana de supresión</a:t>
+            </a:r>
+          </a:p>
+          <a:p>
+            <a:pPr>
+              <a:spcAft>
+                <a:spcPts val="600"/>
+              </a:spcAft>
+            </a:pPr>
+            <a:r>
+              <a:rPr sz="1500">
+                <a:solidFill>
+                  <a:srgbClr val="22282E"/>
+                </a:solidFill>
+              </a:rPr>
+              <a:t>•  GeoIP vacío — Base de datos GeoIP no instalada/actualizada; refresca el feed</a:t>
+            </a:r>
+          </a:p>
+        </p:txBody>
+      </p:sp>
+    </p:spTree>
+  </p:cSld>
+  <p:clrMapOvr>
+    <a:masterClrMapping/>
+  </p:clrMapOvr>
+</p:sld>
+</file>
+
+<file path=ppt/slides/slide15.xml><?xml version="1.0" encoding="utf-8"?>
+<p:sld xmlns:a="http://schemas.openxmlformats.org/drawingml/2006/main" xmlns:p="http://schemas.openxmlformats.org/presentationml/2006/main" xmlns:r="http://schemas.openxmlformats.org/officeDocument/2006/relationships">
+  <p:cSld>
+    <p:spTree>
+      <p:nvGrpSpPr>
+        <p:cNvPr id="1" name=""/>
+        <p:cNvGrpSpPr/>
+        <p:nvPr/>
+      </p:nvGrpSpPr>
+      <p:grpSpPr/>
+      <p:sp>
+        <p:nvSpPr>
+          <p:cNvPr id="2" name="TextBox 1"/>
+          <p:cNvSpPr txBox="1"/>
+          <p:nvPr/>
+        </p:nvSpPr>
+        <p:spPr>
+          <a:xfrm>
+            <a:off x="457200" y="320040"/>
+            <a:ext cx="8229600" cy="822960"/>
+          </a:xfrm>
+          <a:prstGeom prst="rect">
+            <a:avLst/>
+          </a:prstGeom>
+          <a:noFill/>
+        </p:spPr>
+        <p:txBody>
+          <a:bodyPr wrap="square">
+            <a:spAutoFit/>
+          </a:bodyPr>
+          <a:lstStyle/>
+          <a:p>
+            <a:r>
+              <a:rPr sz="2600" b="1">
+                <a:solidFill>
+                  <a:srgbClr val="0B3D2E"/>
+                </a:solidFill>
+              </a:rPr>
+              <a:t>❓ Preguntas frecuentes</a:t>
+            </a:r>
+          </a:p>
+        </p:txBody>
+      </p:sp>
+      <p:sp>
+        <p:nvSpPr>
+          <p:cNvPr id="3" name="TextBox 2"/>
+          <p:cNvSpPr txBox="1"/>
+          <p:nvPr/>
+        </p:nvSpPr>
+        <p:spPr>
+          <a:xfrm>
+            <a:off x="457200" y="1280160"/>
+            <a:ext cx="8229600" cy="4937760"/>
+          </a:xfrm>
+          <a:prstGeom prst="rect">
+            <a:avLst/>
+          </a:prstGeom>
+          <a:noFill/>
+        </p:spPr>
+        <p:txBody>
+          <a:bodyPr wrap="square">
+            <a:spAutoFit/>
+          </a:bodyPr>
+          <a:lstStyle/>
+          <a:p>
+            <a:pPr>
+              <a:spcAft>
+                <a:spcPts val="600"/>
+              </a:spcAft>
+            </a:pPr>
+            <a:r>
+              <a:rPr sz="1500">
+                <a:solidFill>
+                  <a:srgbClr val="22282E"/>
+                </a:solidFill>
+              </a:rPr>
+              <a:t>•  ❓ ¿SIEM o data lake?</a:t>
+            </a:r>
+          </a:p>
+          <a:p>
+            <a:pPr>
+              <a:spcAft>
+                <a:spcPts val="600"/>
+              </a:spcAft>
+            </a:pPr>
+            <a:r>
+              <a:rPr sz="1500">
+                <a:solidFill>
+                  <a:srgbClr val="22282E"/>
+                </a:solidFill>
+              </a:rPr>
+              <a:t>•  El SIEM prioriza correlación y alertas en tiempo real; el data lake, almacenamiento masivo barato. Muchas arquitecturas modernas combinan ambos (SIEM para lo caliente, lake para histórico).</a:t>
+            </a:r>
+          </a:p>
+          <a:p>
+            <a:pPr>
+              <a:spcAft>
+                <a:spcPts val="600"/>
+              </a:spcAft>
+            </a:pPr>
+            <a:r>
+              <a:rPr sz="1500">
+                <a:solidFill>
+                  <a:srgbClr val="22282E"/>
+                </a:solidFill>
+              </a:rPr>
+              <a:t>•  ❓ ¿El SIEM reemplaza al EDR?</a:t>
+            </a:r>
+          </a:p>
+          <a:p>
+            <a:pPr>
+              <a:spcAft>
+                <a:spcPts val="600"/>
+              </a:spcAft>
+            </a:pPr>
+            <a:r>
+              <a:rPr sz="1500">
+                <a:solidFill>
+                  <a:srgbClr val="22282E"/>
+                </a:solidFill>
+              </a:rPr>
+              <a:t>•  No. El EDR ve el endpoint en profundidad y responde; el SIEM correlaciona todas las fuentes. Se complementan; el EDR suele ser una fuente del SIEM.</a:t>
+            </a:r>
+          </a:p>
+          <a:p>
+            <a:pPr>
+              <a:spcAft>
+                <a:spcPts val="600"/>
+              </a:spcAft>
+            </a:pPr>
+            <a:r>
+              <a:rPr sz="1500">
+                <a:solidFill>
+                  <a:srgbClr val="22282E"/>
+                </a:solidFill>
+              </a:rPr>
+              <a:t>•  ❓ ¿Cómo evito que el SIEM se vuelva un basurero de logs?</a:t>
+            </a:r>
+          </a:p>
+          <a:p>
+            <a:pPr>
+              <a:spcAft>
+                <a:spcPts val="600"/>
+              </a:spcAft>
+            </a:pPr>
+            <a:r>
+              <a:rPr sz="1500">
+                <a:solidFill>
+                  <a:srgbClr val="22282E"/>
+                </a:solidFill>
+              </a:rPr>
+              <a:t>•  Ingesta con propósito de detección, no por acumular. Cada fuente debe respaldar al menos un caso de uso de detección o hunting.</a:t>
+            </a:r>
+          </a:p>
+        </p:txBody>
+      </p:sp>
+    </p:spTree>
+  </p:cSld>
+  <p:clrMapOvr>
+    <a:masterClrMapping/>
+  </p:clrMapOvr>
+</p:sld>
+</file>
+
+<file path=ppt/slides/slide16.xml><?xml version="1.0" encoding="utf-8"?>
+<p:sld xmlns:a="http://schemas.openxmlformats.org/drawingml/2006/main" xmlns:p="http://schemas.openxmlformats.org/presentationml/2006/main" xmlns:r="http://schemas.openxmlformats.org/officeDocument/2006/relationships">
+  <p:cSld>
+    <p:spTree>
+      <p:nvGrpSpPr>
+        <p:cNvPr id="1" name=""/>
+        <p:cNvGrpSpPr/>
+        <p:nvPr/>
+      </p:nvGrpSpPr>
+      <p:grpSpPr/>
+      <p:sp>
+        <p:nvSpPr>
+          <p:cNvPr id="2" name="TextBox 1"/>
+          <p:cNvSpPr txBox="1"/>
+          <p:nvPr/>
+        </p:nvSpPr>
+        <p:spPr>
+          <a:xfrm>
+            <a:off x="457200" y="320040"/>
+            <a:ext cx="8229600" cy="822960"/>
+          </a:xfrm>
+          <a:prstGeom prst="rect">
+            <a:avLst/>
+          </a:prstGeom>
+          <a:noFill/>
+        </p:spPr>
+        <p:txBody>
+          <a:bodyPr wrap="square">
+            <a:spAutoFit/>
+          </a:bodyPr>
+          <a:lstStyle/>
+          <a:p>
+            <a:r>
+              <a:rPr sz="2600" b="1">
+                <a:solidFill>
+                  <a:srgbClr val="0B3D2E"/>
+                </a:solidFill>
+              </a:rPr>
+              <a:t>🔗 Referencias verificables y alcance</a:t>
+            </a:r>
+          </a:p>
+        </p:txBody>
+      </p:sp>
+      <p:sp>
+        <p:nvSpPr>
+          <p:cNvPr id="3" name="TextBox 2"/>
+          <p:cNvSpPr txBox="1"/>
+          <p:nvPr/>
+        </p:nvSpPr>
+        <p:spPr>
+          <a:xfrm>
+            <a:off x="457200" y="1280160"/>
+            <a:ext cx="8229600" cy="4937760"/>
+          </a:xfrm>
+          <a:prstGeom prst="rect">
+            <a:avLst/>
+          </a:prstGeom>
+          <a:noFill/>
+        </p:spPr>
+        <p:txBody>
+          <a:bodyPr wrap="square">
+            <a:spAutoFit/>
+          </a:bodyPr>
+          <a:lstStyle/>
+          <a:p>
+            <a:pPr>
+              <a:spcAft>
+                <a:spcPts val="600"/>
+              </a:spcAft>
+            </a:pPr>
+            <a:r>
+              <a:rPr sz="1500">
+                <a:solidFill>
+                  <a:srgbClr val="22282E"/>
+                </a:solidFill>
+              </a:rPr>
+              <a:t>•  NIST SP 800-92: fuente primaria para la arquitectura y los procesos de gestión de logs que un SIEM implementa parcialmente — &lt;https://doi.org/10.6028/NIST.SP.800-92&gt;</a:t>
+            </a:r>
+          </a:p>
+          <a:p>
+            <a:pPr>
+              <a:spcAft>
+                <a:spcPts val="600"/>
+              </a:spcAft>
+            </a:pPr>
+            <a:r>
+              <a:rPr sz="1500">
+                <a:solidFill>
+                  <a:srgbClr val="22282E"/>
+                </a:solidFill>
+              </a:rPr>
+              <a:t>•  Elastic, documentación oficial sobre creación y ejecución de reglas: respalda el recorrido desde datos consultables hasta una alerta en Elastic Security —…</a:t>
+            </a:r>
+          </a:p>
+          <a:p>
+            <a:pPr>
+              <a:spcAft>
+                <a:spcPts val="600"/>
+              </a:spcAft>
+            </a:pPr>
+            <a:r>
+              <a:rPr sz="1500">
+                <a:solidFill>
+                  <a:srgbClr val="22282E"/>
+                </a:solidFill>
+              </a:rPr>
+              <a:t>•  Splunk, documentación oficial de indexación: respalda los conceptos de parsing, índices, tiempo del evento y almacenamiento en Splunk —…</a:t>
+            </a:r>
+          </a:p>
+          <a:p>
+            <a:pPr>
+              <a:spcAft>
+                <a:spcPts val="600"/>
+              </a:spcAft>
+            </a:pPr>
+            <a:r>
+              <a:rPr sz="1500">
+                <a:solidFill>
+                  <a:srgbClr val="22282E"/>
+                </a:solidFill>
+              </a:rPr>
+              <a:t>•  Wazuh, arquitectura oficial: describe agente, servidor, indexer, dashboard y su flujo de datos; no se extrapola automáticamente a otros SIEM —…</a:t>
+            </a:r>
+          </a:p>
+          <a:p>
+            <a:pPr>
+              <a:spcAft>
+                <a:spcPts val="600"/>
+              </a:spcAft>
+            </a:pPr>
+            <a:r>
+              <a:rPr sz="1500">
+                <a:solidFill>
+                  <a:srgbClr val="22282E"/>
+                </a:solidFill>
+              </a:rPr>
+              <a:t>•  Murdoch, D. Blue Team Handbook: SOC, SIEM, and Threat Hunting Use Cases: bibliografía profesional complementaria para casos de uso operativos.</a:t>
+            </a:r>
+          </a:p>
+        </p:txBody>
+      </p:sp>
+    </p:spTree>
+  </p:cSld>
+  <p:clrMapOvr>
+    <a:masterClrMapping/>
+  </p:clrMapOvr>
+</p:sld>
+</file>
+
+<file path=ppt/slides/slide17.xml><?xml version="1.0" encoding="utf-8"?>
+<p:sld xmlns:a="http://schemas.openxmlformats.org/drawingml/2006/main" xmlns:p="http://schemas.openxmlformats.org/presentationml/2006/main" xmlns:r="http://schemas.openxmlformats.org/officeDocument/2006/relationships">
+  <p:cSld>
+    <p:spTree>
+      <p:nvGrpSpPr>
+        <p:cNvPr id="1" name=""/>
+        <p:cNvGrpSpPr/>
+        <p:nvPr/>
+      </p:nvGrpSpPr>
+      <p:grpSpPr/>
+      <p:sp>
+        <p:nvSpPr>
+          <p:cNvPr id="2" name="TextBox 1"/>
+          <p:cNvSpPr txBox="1"/>
+          <p:nvPr/>
+        </p:nvSpPr>
+        <p:spPr>
+          <a:xfrm>
+            <a:off x="457200" y="274320"/>
+            <a:ext cx="8229600" cy="640080"/>
+          </a:xfrm>
+          <a:prstGeom prst="rect">
+            <a:avLst/>
+          </a:prstGeom>
+          <a:noFill/>
+        </p:spPr>
+        <p:txBody>
+          <a:bodyPr wrap="square">
+            <a:spAutoFit/>
+          </a:bodyPr>
+          <a:lstStyle/>
+          <a:p>
+            <a:r>
+              <a:rPr sz="2200" b="1">
+                <a:solidFill>
+                  <a:srgbClr val="0B3D2E"/>
+                </a:solidFill>
+              </a:rPr>
+              <a:t>Diagrama de la clase</a:t>
+            </a:r>
+          </a:p>
+        </p:txBody>
+      </p:sp>
+      <p:pic>
+        <p:nvPicPr>
+          <p:cNvPr id="3" name="Picture 2" descr="a8555da586ff5da0.png"/>
+          <p:cNvPicPr>
+            <a:picLocks noChangeAspect="1"/>
+          </p:cNvPicPr>
+          <p:nvPr/>
+        </p:nvPicPr>
+        <p:blipFill>
+          <a:blip r:embed="rId2"/>
+          <a:stretch>
+            <a:fillRect/>
+          </a:stretch>
+        </p:blipFill>
+        <p:spPr>
+          <a:xfrm>
+            <a:off x="457200" y="3378708"/>
+            <a:ext cx="8229600" cy="740664"/>
+          </a:xfrm>
+          <a:prstGeom prst="rect">
+            <a:avLst/>
+          </a:prstGeom>
+        </p:spPr>
+      </p:pic>
     </p:spTree>
   </p:cSld>
   <p:clrMapOvr>
@@ -3698,7 +4359,7 @@
                   <a:srgbClr val="22282E"/>
                 </a:solidFill>
               </a:rPr>
-              <a:t>•  Comprender qué es un SIEM (Security Information and Event Management), de qué piezas se compone y cómo fluye un evento desde la recolección hasta la alerta. Entenderás las decisiones de arquitectura (ingesta, parsing, indexación, correlación, retención) que determinan si un SIEM detecta o solo acumula datos.</a:t>
+              <a:t>•  Comprender qué es un SIEM (Security Information and Event Management), de qué piezas se compone y cómo fluye un evento desde la recolección hasta la alerta. Entenderás las decisiones de arquitectura…</a:t>
             </a:r>
           </a:p>
         </p:txBody>
@@ -4092,7 +4753,7 @@
                   <a:srgbClr val="0B3D2E"/>
                 </a:solidFill>
               </a:rPr>
-              <a:t>📖 Definiciones y características</a:t>
+              <a:t>🧠 Explicación en profundidad</a:t>
             </a:r>
           </a:p>
         </p:txBody>
@@ -4130,97 +4791,97 @@
                   <a:srgbClr val="22282E"/>
                 </a:solidFill>
               </a:rPr>
-              <a:t>•  SIEM: plataforma que centraliza, normaliza y correlaciona eventos de seguridad para detectar, investigar y reportar. Característica: correlación entre múltiples fuentes en tiempo casi real.</a:t>
-            </a:r>
-          </a:p>
-          <a:p>
-            <a:pPr>
-              <a:spcAft>
-                <a:spcPts val="600"/>
-              </a:spcAft>
-            </a:pPr>
-            <a:r>
-              <a:rPr sz="1500">
-                <a:solidFill>
-                  <a:srgbClr val="22282E"/>
-                </a:solidFill>
-              </a:rPr>
-              <a:t>•  Colector/forwarder: agente o servicio que recibe y reenvía logs (Universal Forwarder de Splunk, Beats de Elastic). Característica: puede filtrar y enrutar en origen.</a:t>
-            </a:r>
-          </a:p>
-          <a:p>
-            <a:pPr>
-              <a:spcAft>
-                <a:spcPts val="600"/>
-              </a:spcAft>
-            </a:pPr>
-            <a:r>
-              <a:rPr sz="1500">
-                <a:solidFill>
-                  <a:srgbClr val="22282E"/>
-                </a:solidFill>
-              </a:rPr>
-              <a:t>•  Parser: convierte texto crudo en campos estructurados (srcip, user, eventid). Característica: específico por tipo de fuente.</a:t>
-            </a:r>
-          </a:p>
-          <a:p>
-            <a:pPr>
-              <a:spcAft>
-                <a:spcPts val="600"/>
-              </a:spcAft>
-            </a:pPr>
-            <a:r>
-              <a:rPr sz="1500">
-                <a:solidFill>
-                  <a:srgbClr val="22282E"/>
-                </a:solidFill>
-              </a:rPr>
-              <a:t>•  Enriquecimiento: añade contexto externo (geolocalización, reputación, propietario del activo). Característica: aumenta la precisión del triaje.</a:t>
-            </a:r>
-          </a:p>
-          <a:p>
-            <a:pPr>
-              <a:spcAft>
-                <a:spcPts val="600"/>
-              </a:spcAft>
-            </a:pPr>
-            <a:r>
-              <a:rPr sz="1500">
-                <a:solidFill>
-                  <a:srgbClr val="22282E"/>
-                </a:solidFill>
-              </a:rPr>
-              <a:t>•  Regla de correlación: lógica que dispara una alerta al cumplirse condiciones sobre uno o varios eventos. Característica: puede ser umbral, secuencia o anomalía.</a:t>
-            </a:r>
-          </a:p>
-          <a:p>
-            <a:pPr>
-              <a:spcAft>
-                <a:spcPts val="600"/>
-              </a:spcAft>
-            </a:pPr>
-            <a:r>
-              <a:rPr sz="1500">
-                <a:solidFill>
-                  <a:srgbClr val="22282E"/>
-                </a:solidFill>
-              </a:rPr>
-              <a:t>•  EPS (Events Per Second): volumen de eventos por segundo. Característica: métrica de dimensionamiento y licenciamiento.</a:t>
-            </a:r>
-          </a:p>
-          <a:p>
-            <a:pPr>
-              <a:spcAft>
-                <a:spcPts val="600"/>
-              </a:spcAft>
-            </a:pPr>
-            <a:r>
-              <a:rPr sz="1500">
-                <a:solidFill>
-                  <a:srgbClr val="22282E"/>
-                </a:solidFill>
-              </a:rPr>
-              <a:t>•  Retención caliente/fría: datos recientes rápidos de consultar (hot) vs históricos baratos (cold). Característica: equilibrio coste/velocidad.</a:t>
+              <a:t>•  Un SIEM es una cadena de suministro de evidencia. Si un eslabón pierde datos, cambia tipos o introduce retraso, la consulta final puede ejecutarse correctamente y aun así responder mal. La…</a:t>
+            </a:r>
+          </a:p>
+          <a:p>
+            <a:pPr>
+              <a:spcAft>
+                <a:spcPts val="600"/>
+              </a:spcAft>
+            </a:pPr>
+            <a:r>
+              <a:rPr sz="1500">
+                <a:solidFill>
+                  <a:srgbClr val="22282E"/>
+                </a:solidFill>
+              </a:rPr>
+              <a:t>•  EPS mide eventos por segundo, mientras GB/día mide bytes ingeridos; ninguno sustituye al otro. El diseño debe considerar picos, tamaño por evento, compresión, réplicas y consultas concurrentes. Un…</a:t>
+            </a:r>
+          </a:p>
+          <a:p>
+            <a:pPr>
+              <a:spcAft>
+                <a:spcPts val="600"/>
+              </a:spcAft>
+            </a:pPr>
+            <a:r>
+              <a:rPr sz="1500">
+                <a:solidFill>
+                  <a:srgbClr val="22282E"/>
+                </a:solidFill>
+              </a:rPr>
+              <a:t>•  El enriquecimiento añade valor —criticidad del activo, propietario, identidad o inteligencia—, pero necesita procedencia y caducidad. Una dirección IP puede cambiar de propietario; un usuario puede…</a:t>
+            </a:r>
+          </a:p>
+          <a:p>
+            <a:pPr>
+              <a:spcAft>
+                <a:spcPts val="600"/>
+              </a:spcAft>
+            </a:pPr>
+            <a:r>
+              <a:rPr sz="1500">
+                <a:solidFill>
+                  <a:srgbClr val="22282E"/>
+                </a:solidFill>
+              </a:rPr>
+              <a:t>•  Imagina una caída de red de veinte minutos. Un agente con buffer local puede reenviar los eventos cuando vuelve la conexión; un envío UDP sin confirmación puede perderlos. Ambos dashboards podrían…</a:t>
+            </a:r>
+          </a:p>
+          <a:p>
+            <a:pPr>
+              <a:spcAft>
+                <a:spcPts val="600"/>
+              </a:spcAft>
+            </a:pPr>
+            <a:r>
+              <a:rPr sz="1500">
+                <a:solidFill>
+                  <a:srgbClr val="22282E"/>
+                </a:solidFill>
+              </a:rPr>
+              <a:t>•  El dimensionamiento requiere una historia cuantitativa. Si 5.000 endpoints producen un promedio moderado pero una actualización dispara creación de procesos simultánea, el pico puede superar parsers…</a:t>
+            </a:r>
+          </a:p>
+          <a:p>
+            <a:pPr>
+              <a:spcAft>
+                <a:spcPts val="600"/>
+              </a:spcAft>
+            </a:pPr>
+            <a:r>
+              <a:rPr sz="1500">
+                <a:solidFill>
+                  <a:srgbClr val="22282E"/>
+                </a:solidFill>
+              </a:rPr>
+              <a:t>•  El diagrama también muestra dos productos diferentes: eventos y casos. Entre ambos deben existir reglas de agrupación. Diez alertas del mismo proceso en un host pueden ser un caso; la misma alerta en…</a:t>
+            </a:r>
+          </a:p>
+          <a:p>
+            <a:pPr>
+              <a:spcAft>
+                <a:spcPts val="600"/>
+              </a:spcAft>
+            </a:pPr>
+            <a:r>
+              <a:rPr sz="1500">
+                <a:solidFill>
+                  <a:srgbClr val="22282E"/>
+                </a:solidFill>
+              </a:rPr>
+              <a:t>•  No toda la telemetría necesita la misma velocidad. Los eventos usados por alertas inmediatas permanecen en una capa de consulta rápida; la historia menos consultada puede pasar a almacenamiento…</a:t>
             </a:r>
           </a:p>
         </p:txBody>
@@ -4271,7 +4932,7 @@
                   <a:srgbClr val="0B3D2E"/>
                 </a:solidFill>
               </a:rPr>
-              <a:t>🧰 Herramientas y preparación</a:t>
+              <a:t>📔 Glosario</a:t>
             </a:r>
           </a:p>
         </p:txBody>
@@ -4309,67 +4970,97 @@
                   <a:srgbClr val="22282E"/>
                 </a:solidFill>
               </a:rPr>
-              <a:t>•  Para experimentar la arquitectura, prepara en laboratorio aislado uno de estos stacks:</a:t>
-            </a:r>
-          </a:p>
-          <a:p>
-            <a:pPr>
-              <a:spcAft>
-                <a:spcPts val="600"/>
-              </a:spcAft>
-            </a:pPr>
-            <a:r>
-              <a:rPr sz="1500">
-                <a:solidFill>
-                  <a:srgbClr val="22282E"/>
-                </a:solidFill>
-              </a:rPr>
-              <a:t>•  Splunk Free/Enterprise Trial con un Universal Forwarder enviando datos.</a:t>
-            </a:r>
-          </a:p>
-          <a:p>
-            <a:pPr>
-              <a:spcAft>
-                <a:spcPts val="600"/>
-              </a:spcAft>
-            </a:pPr>
-            <a:r>
-              <a:rPr sz="1500">
-                <a:solidFill>
-                  <a:srgbClr val="22282E"/>
-                </a:solidFill>
-              </a:rPr>
-              <a:t>•  Elastic Stack (Elasticsearch + Logstash/Beats + Kibana) vía Docker Compose.</a:t>
-            </a:r>
-          </a:p>
-          <a:p>
-            <a:pPr>
-              <a:spcAft>
-                <a:spcPts val="600"/>
-              </a:spcAft>
-            </a:pPr>
-            <a:r>
-              <a:rPr sz="1500">
-                <a:solidFill>
-                  <a:srgbClr val="22282E"/>
-                </a:solidFill>
-              </a:rPr>
-              <a:t>•  Wazuh (indexer + manager + dashboard) para un SIEM open source completo.</a:t>
-            </a:r>
-          </a:p>
-          <a:p>
-            <a:pPr>
-              <a:spcAft>
-                <a:spcPts val="600"/>
-              </a:spcAft>
-            </a:pPr>
-            <a:r>
-              <a:rPr sz="1500">
-                <a:solidFill>
-                  <a:srgbClr val="22282E"/>
-                </a:solidFill>
-              </a:rPr>
-              <a:t>•  Reutiliza la telemetría de la clase 182 (Sysmon, Zeek) como fuente de ingesta. Trabaja siempre en tu red de laboratorio.</a:t>
+              <a:t>•  Forwarder: agente que transporta eventos desde el origen.</a:t>
+            </a:r>
+          </a:p>
+          <a:p>
+            <a:pPr>
+              <a:spcAft>
+                <a:spcPts val="600"/>
+              </a:spcAft>
+            </a:pPr>
+            <a:r>
+              <a:rPr sz="1500">
+                <a:solidFill>
+                  <a:srgbClr val="22282E"/>
+                </a:solidFill>
+              </a:rPr>
+              <a:t>•  Broker: cola duradera que desacopla etapas.</a:t>
+            </a:r>
+          </a:p>
+          <a:p>
+            <a:pPr>
+              <a:spcAft>
+                <a:spcPts val="600"/>
+              </a:spcAft>
+            </a:pPr>
+            <a:r>
+              <a:rPr sz="1500">
+                <a:solidFill>
+                  <a:srgbClr val="22282E"/>
+                </a:solidFill>
+              </a:rPr>
+              <a:t>•  EPS: eventos procesados por segundo.</a:t>
+            </a:r>
+          </a:p>
+          <a:p>
+            <a:pPr>
+              <a:spcAft>
+                <a:spcPts val="600"/>
+              </a:spcAft>
+            </a:pPr>
+            <a:r>
+              <a:rPr sz="1500">
+                <a:solidFill>
+                  <a:srgbClr val="22282E"/>
+                </a:solidFill>
+              </a:rPr>
+              <a:t>•  Backpressure: acumulación causada por un consumidor más lento que el productor.</a:t>
+            </a:r>
+          </a:p>
+          <a:p>
+            <a:pPr>
+              <a:spcAft>
+                <a:spcPts val="600"/>
+              </a:spcAft>
+            </a:pPr>
+            <a:r>
+              <a:rPr sz="1500">
+                <a:solidFill>
+                  <a:srgbClr val="22282E"/>
+                </a:solidFill>
+              </a:rPr>
+              <a:t>•  Índice: estructura optimizada para buscar campos.</a:t>
+            </a:r>
+          </a:p>
+          <a:p>
+            <a:pPr>
+              <a:spcAft>
+                <a:spcPts val="600"/>
+              </a:spcAft>
+            </a:pPr>
+            <a:r>
+              <a:rPr sz="1500">
+                <a:solidFill>
+                  <a:srgbClr val="22282E"/>
+                </a:solidFill>
+              </a:rPr>
+              <a:t>•  Data lake: repositorio de datos a gran escala, usualmente con varios esquemas.</a:t>
+            </a:r>
+          </a:p>
+          <a:p>
+            <a:pPr>
+              <a:spcAft>
+                <a:spcPts val="600"/>
+              </a:spcAft>
+            </a:pPr>
+            <a:r>
+              <a:rPr sz="1500">
+                <a:solidFill>
+                  <a:srgbClr val="22282E"/>
+                </a:solidFill>
+              </a:rPr>
+              <a:t>•  Enriquecimiento: contexto adicional unido a un evento.</a:t>
             </a:r>
           </a:p>
         </p:txBody>
@@ -4420,7 +5111,7 @@
                   <a:srgbClr val="0B3D2E"/>
                 </a:solidFill>
               </a:rPr>
-              <a:t>🧪 Laboratorio guiado — Traza un evento de punta a punta</a:t>
+              <a:t>📖 Definiciones y características</a:t>
             </a:r>
           </a:p>
         </p:txBody>
@@ -4458,97 +5149,97 @@
                   <a:srgbClr val="22282E"/>
                 </a:solidFill>
               </a:rPr>
-              <a:t>•  Levanta el SIEM. Con Docker Compose despliega Elastic (o instala Splunk Free). Confirma acceso a Kibana/Splunk Web.</a:t>
-            </a:r>
-          </a:p>
-          <a:p>
-            <a:pPr>
-              <a:spcAft>
-                <a:spcPts val="600"/>
-              </a:spcAft>
-            </a:pPr>
-            <a:r>
-              <a:rPr sz="1500">
-                <a:solidFill>
-                  <a:srgbClr val="22282E"/>
-                </a:solidFill>
-              </a:rPr>
-              <a:t>•  Conecta una fuente. Reenvía los Sysmon/Event Logs del Windows de laboratorio con Winlogbeat/Universal Forwarder.</a:t>
-            </a:r>
-          </a:p>
-          <a:p>
-            <a:pPr>
-              <a:spcAft>
-                <a:spcPts val="600"/>
-              </a:spcAft>
-            </a:pPr>
-            <a:r>
-              <a:rPr sz="1500">
-                <a:solidFill>
-                  <a:srgbClr val="22282E"/>
-                </a:solidFill>
-              </a:rPr>
-              <a:t>•  Verifica el parsing. Busca un evento de creación de proceso y comprueba que campos como process.commandline o Image están extraídos, no en texto plano.</a:t>
-            </a:r>
-          </a:p>
-          <a:p>
-            <a:pPr>
-              <a:spcAft>
-                <a:spcPts val="600"/>
-              </a:spcAft>
-            </a:pPr>
-            <a:r>
-              <a:rPr sz="1500">
-                <a:solidFill>
-                  <a:srgbClr val="22282E"/>
-                </a:solidFill>
-              </a:rPr>
-              <a:t>•  Añade enriquecimiento. Configura un pipeline que agregue GeoIP a las IP públicas (Logstash geoip o Splunk iplocation).</a:t>
-            </a:r>
-          </a:p>
-          <a:p>
-            <a:pPr>
-              <a:spcAft>
-                <a:spcPts val="600"/>
-              </a:spcAft>
-            </a:pPr>
-            <a:r>
-              <a:rPr sz="1500">
-                <a:solidFill>
-                  <a:srgbClr val="22282E"/>
-                </a:solidFill>
-              </a:rPr>
-              <a:t>•  Escribe una correlación simple. Regla que alerte ante 5 fallos de autenticación (Event ID 4625) seguidos de un éxito (4624) para el mismo usuario en 5 minutos.</a:t>
-            </a:r>
-          </a:p>
-          <a:p>
-            <a:pPr>
-              <a:spcAft>
-                <a:spcPts val="600"/>
-              </a:spcAft>
-            </a:pPr>
-            <a:r>
-              <a:rPr sz="1500">
-                <a:solidFill>
-                  <a:srgbClr val="22282E"/>
-                </a:solidFill>
-              </a:rPr>
-              <a:t>•  Mide la ingesta. Observa EPS/GB por día en el panel de monitoreo del SIEM y proyecta el volumen a 30 días.</a:t>
-            </a:r>
-          </a:p>
-          <a:p>
-            <a:pPr>
-              <a:spcAft>
-                <a:spcPts val="600"/>
-              </a:spcAft>
-            </a:pPr>
-            <a:r>
-              <a:rPr sz="1500">
-                <a:solidFill>
-                  <a:srgbClr val="22282E"/>
-                </a:solidFill>
-              </a:rPr>
-              <a:t>•  Prueba retención. Configura un índice con política de ciclo de vida (ILM en Elastic) que mueva datos a fase fría a los 7 días.</a:t>
+              <a:t>•  SIEM: plataforma que centraliza, normaliza y correlaciona eventos de seguridad para detectar, investigar y reportar. Característica: correlación entre múltiples fuentes en tiempo casi real.</a:t>
+            </a:r>
+          </a:p>
+          <a:p>
+            <a:pPr>
+              <a:spcAft>
+                <a:spcPts val="600"/>
+              </a:spcAft>
+            </a:pPr>
+            <a:r>
+              <a:rPr sz="1500">
+                <a:solidFill>
+                  <a:srgbClr val="22282E"/>
+                </a:solidFill>
+              </a:rPr>
+              <a:t>•  Colector/forwarder: agente o servicio que recibe y reenvía logs (Universal Forwarder de Splunk, Beats de Elastic). Característica: puede filtrar y enrutar en origen.</a:t>
+            </a:r>
+          </a:p>
+          <a:p>
+            <a:pPr>
+              <a:spcAft>
+                <a:spcPts val="600"/>
+              </a:spcAft>
+            </a:pPr>
+            <a:r>
+              <a:rPr sz="1500">
+                <a:solidFill>
+                  <a:srgbClr val="22282E"/>
+                </a:solidFill>
+              </a:rPr>
+              <a:t>•  Parser: convierte texto crudo en campos estructurados (srcip, user, eventid). Característica: específico por tipo de fuente.</a:t>
+            </a:r>
+          </a:p>
+          <a:p>
+            <a:pPr>
+              <a:spcAft>
+                <a:spcPts val="600"/>
+              </a:spcAft>
+            </a:pPr>
+            <a:r>
+              <a:rPr sz="1500">
+                <a:solidFill>
+                  <a:srgbClr val="22282E"/>
+                </a:solidFill>
+              </a:rPr>
+              <a:t>•  Enriquecimiento: añade contexto externo (geolocalización, reputación, propietario del activo). Característica: aumenta la precisión del triaje.</a:t>
+            </a:r>
+          </a:p>
+          <a:p>
+            <a:pPr>
+              <a:spcAft>
+                <a:spcPts val="600"/>
+              </a:spcAft>
+            </a:pPr>
+            <a:r>
+              <a:rPr sz="1500">
+                <a:solidFill>
+                  <a:srgbClr val="22282E"/>
+                </a:solidFill>
+              </a:rPr>
+              <a:t>•  Regla de correlación: lógica que dispara una alerta al cumplirse condiciones sobre uno o varios eventos. Característica: puede ser umbral, secuencia o anomalía.</a:t>
+            </a:r>
+          </a:p>
+          <a:p>
+            <a:pPr>
+              <a:spcAft>
+                <a:spcPts val="600"/>
+              </a:spcAft>
+            </a:pPr>
+            <a:r>
+              <a:rPr sz="1500">
+                <a:solidFill>
+                  <a:srgbClr val="22282E"/>
+                </a:solidFill>
+              </a:rPr>
+              <a:t>•  EPS (Events Per Second): volumen de eventos por segundo. Característica: métrica de dimensionamiento y licenciamiento.</a:t>
+            </a:r>
+          </a:p>
+          <a:p>
+            <a:pPr>
+              <a:spcAft>
+                <a:spcPts val="600"/>
+              </a:spcAft>
+            </a:pPr>
+            <a:r>
+              <a:rPr sz="1500">
+                <a:solidFill>
+                  <a:srgbClr val="22282E"/>
+                </a:solidFill>
+              </a:rPr>
+              <a:t>•  Retención caliente/fría: datos recientes rápidos de consultar (hot) vs históricos baratos (cold). Característica: equilibrio coste/velocidad.</a:t>
             </a:r>
           </a:p>
         </p:txBody>
@@ -4599,7 +5290,7 @@
                   <a:srgbClr val="0B3D2E"/>
                 </a:solidFill>
               </a:rPr>
-              <a:t>✍️ Ejercicios</a:t>
+              <a:t>🔍 Diagnóstico resuelto — la regla dejó de alertar</a:t>
             </a:r>
           </a:p>
         </p:txBody>
@@ -4637,82 +5328,97 @@
                   <a:srgbClr val="22282E"/>
                 </a:solidFill>
               </a:rPr>
-              <a:t>•  Dibuja el pipeline completo de tu SIEM con cada componente etiquetado.</a:t>
-            </a:r>
-          </a:p>
-          <a:p>
-            <a:pPr>
-              <a:spcAft>
-                <a:spcPts val="600"/>
-              </a:spcAft>
-            </a:pPr>
-            <a:r>
-              <a:rPr sz="1500">
-                <a:solidFill>
-                  <a:srgbClr val="22282E"/>
-                </a:solidFill>
-              </a:rPr>
-              <a:t>•  Calcula el GB/día si ingestas 2.000 EPS con un tamaño medio de evento de 800 bytes.</a:t>
-            </a:r>
-          </a:p>
-          <a:p>
-            <a:pPr>
-              <a:spcAft>
-                <a:spcPts val="600"/>
-              </a:spcAft>
-            </a:pPr>
-            <a:r>
-              <a:rPr sz="1500">
-                <a:solidFill>
-                  <a:srgbClr val="22282E"/>
-                </a:solidFill>
-              </a:rPr>
-              <a:t>•  Escribe el parser (regex o pipeline) para una línea de log de tu firewall.</a:t>
-            </a:r>
-          </a:p>
-          <a:p>
-            <a:pPr>
-              <a:spcAft>
-                <a:spcPts val="600"/>
-              </a:spcAft>
-            </a:pPr>
-            <a:r>
-              <a:rPr sz="1500">
-                <a:solidFill>
-                  <a:srgbClr val="22282E"/>
-                </a:solidFill>
-              </a:rPr>
-              <a:t>•  Compara SIEM on-prem vs cloud-native con 4 criterios (coste, escalado, control, mantenimiento).</a:t>
-            </a:r>
-          </a:p>
-          <a:p>
-            <a:pPr>
-              <a:spcAft>
-                <a:spcPts val="600"/>
-              </a:spcAft>
-            </a:pPr>
-            <a:r>
-              <a:rPr sz="1500">
-                <a:solidFill>
-                  <a:srgbClr val="22282E"/>
-                </a:solidFill>
-              </a:rPr>
-              <a:t>•  Diseña un esquema de enriquecimiento con 3 fuentes de contexto.</a:t>
-            </a:r>
-          </a:p>
-          <a:p>
-            <a:pPr>
-              <a:spcAft>
-                <a:spcPts val="600"/>
-              </a:spcAft>
-            </a:pPr>
-            <a:r>
-              <a:rPr sz="1500">
-                <a:solidFill>
-                  <a:srgbClr val="22282E"/>
-                </a:solidFill>
-              </a:rPr>
-              <a:t>•  Justifica una política hot/warm/cold para 90 días de retención.</a:t>
+              <a:t>•  Una detección de creación de cuentas producía resultados diarios y pasa a cero. Reiniciar la búsqueda o bajar el umbral no identifica la causa. Se recorre el pipeline desde el origen:</a:t>
+            </a:r>
+          </a:p>
+          <a:p>
+            <a:pPr>
+              <a:spcAft>
+                <a:spcPts val="600"/>
+              </a:spcAft>
+            </a:pPr>
+            <a:r>
+              <a:rPr sz="1500">
+                <a:solidFill>
+                  <a:srgbClr val="22282E"/>
+                </a:solidFill>
+              </a:rPr>
+              <a:t>•  El productor sigue generando el evento; se verifica localmente con una acción controlada.</a:t>
+            </a:r>
+          </a:p>
+          <a:p>
+            <a:pPr>
+              <a:spcAft>
+                <a:spcPts val="600"/>
+              </a:spcAft>
+            </a:pPr>
+            <a:r>
+              <a:rPr sz="1500">
+                <a:solidFill>
+                  <a:srgbClr val="22282E"/>
+                </a:solidFill>
+              </a:rPr>
+              <a:t>•  El forwarder informa envío, pero la cola local crece: el destino rechaza conexiones por un certificado renovado.</a:t>
+            </a:r>
+          </a:p>
+          <a:p>
+            <a:pPr>
+              <a:spcAft>
+                <a:spcPts val="600"/>
+              </a:spcAft>
+            </a:pPr>
+            <a:r>
+              <a:rPr sz="1500">
+                <a:solidFill>
+                  <a:srgbClr val="22282E"/>
+                </a:solidFill>
+              </a:rPr>
+              <a:t>•  El broker no recibe nuevos eventos de esa fuente, mientras otras mantienen su tasa.</a:t>
+            </a:r>
+          </a:p>
+          <a:p>
+            <a:pPr>
+              <a:spcAft>
+                <a:spcPts val="600"/>
+              </a:spcAft>
+            </a:pPr>
+            <a:r>
+              <a:rPr sz="1500">
+                <a:solidFill>
+                  <a:srgbClr val="22282E"/>
+                </a:solidFill>
+              </a:rPr>
+              <a:t>•  Parseo e índice funcionan para los últimos eventos conocidos; la consulta también coincide con un fixture histórico.</a:t>
+            </a:r>
+          </a:p>
+          <a:p>
+            <a:pPr>
+              <a:spcAft>
+                <a:spcPts val="600"/>
+              </a:spcAft>
+            </a:pPr>
+            <a:r>
+              <a:rPr sz="1500">
+                <a:solidFill>
+                  <a:srgbClr val="22282E"/>
+                </a:solidFill>
+              </a:rPr>
+              <a:t>•  La causa es transporte, no lógica de detección. La respuesta restaura confianza/certificado, observa que la cola drena sin pérdida y comprueba el evento sintético hasta el caso. Si solo se hubiera…</a:t>
+            </a:r>
+          </a:p>
+          <a:p>
+            <a:pPr>
+              <a:spcAft>
+                <a:spcPts val="600"/>
+              </a:spcAft>
+            </a:pPr>
+            <a:r>
+              <a:rPr sz="1500">
+                <a:solidFill>
+                  <a:srgbClr val="22282E"/>
+                </a:solidFill>
+              </a:rPr>
+              <a:t>•  Supón 5.000 endpoints, 0,8 EPS promedio y picos de 4 EPS durante actualizaciones. El promedio conjunto es 4.000 EPS, pero el pico teórico alcanza 20.000. El diseño debe declarar simultaneidad…</a:t>
             </a:r>
           </a:p>
         </p:txBody>
@@ -4763,7 +5469,7 @@
                   <a:srgbClr val="0B3D2E"/>
                 </a:solidFill>
               </a:rPr>
-              <a:t>📝 Reto verificable</a:t>
+              <a:t>✅ Criterio de dominio</a:t>
             </a:r>
           </a:p>
         </p:txBody>
@@ -4801,7 +5507,7 @@
                   <a:srgbClr val="22282E"/>
                 </a:solidFill>
               </a:rPr>
-              <a:t>•  Documenta el recorrido de un evento real de tu laboratorio: captura de pantalla del dato crudo, del dato parseado con sus campos, del enriquecimiento aplicado y de la alerta correlacionada que dispara. Criterio de aceptación: la regla de correlación de fuerza bruta (múltiples 4625 + un 4624) dispara una alerta en el SIEM y puedes explicar en qué índice quedó y cuánto tiempo se retiene.</a:t>
+              <a:t>•  El alumno debe localizar una falla por etapa, distinguir ingestión de detección, justificar buffer y política de saturación, y explicar cómo permisos, retención y enriquecimiento afectan evidencia.…</a:t>
             </a:r>
           </a:p>
         </p:txBody>
